--- a/Doc/cluster_analysis/C03_Cell_Pipe/C03_Cell_Pipe_260501022223_Analysis_v001.pptx
+++ b/Doc/cluster_analysis/C03_Cell_Pipe/C03_Cell_Pipe_260501022223_Analysis_v001.pptx
@@ -4,6 +4,9 @@
   <p:sldMasterIdLst>
     <p:sldMasterId id="2147483648" r:id="rId1"/>
   </p:sldMasterIdLst>
+  <p:notesMasterIdLst>
+    <p:notesMasterId r:id="rId7"/>
+  </p:notesMasterIdLst>
   <p:sldIdLst>
     <p:sldId id="256" r:id="rId2"/>
     <p:sldId id="257" r:id="rId3"/>
@@ -11,11 +14,8 @@
     <p:sldId id="259" r:id="rId5"/>
     <p:sldId id="260" r:id="rId6"/>
   </p:sldIdLst>
-  <p:notesMasterIdLst>
-    <p:notesMasterId r:id="rId7"/>
-  </p:notesMasterIdLst>
-  <p:sldSz cx="12191695" cy="6858000"/>
-  <p:notesSz cx="6858000" cy="12191695"/>
+  <p:sldSz cx="12192000" cy="6858000"/>
+  <p:notesSz cx="6858000" cy="12192000"/>
   <p:defaultTextStyle>
     <a:lvl1pPr marL="0" algn="l" defTabSz="914400" rtl="0" eaLnBrk="1" latinLnBrk="0" hangingPunct="1">
       <a:defRPr sz="1800" kern="1200">
@@ -108,6 +108,11 @@
       </a:defRPr>
     </a:lvl9pPr>
   </p:defaultTextStyle>
+  <p:extLst>
+    <p:ext uri="{EFAFB233-063F-42B5-8137-9DF3F51BA10A}">
+      <p15:sldGuideLst xmlns:p15="http://schemas.microsoft.com/office/powerpoint/2012/main"/>
+    </p:ext>
+  </p:extLst>
 </p:presentation>
 </file>
 
@@ -133,240 +138,16 @@
           <a:chExt cx="0" cy="0"/>
         </a:xfrm>
       </p:grpSpPr>
-      <p:sp>
-        <p:nvSpPr>
-          <p:cNvPr id="2" name="Header Placeholder 1"/>
-          <p:cNvSpPr>
-            <a:spLocks noGrp="1"/>
-          </p:cNvSpPr>
-          <p:nvPr>
-            <p:ph type="hdr" sz="quarter"/>
-          </p:nvPr>
-        </p:nvSpPr>
-        <p:spPr>
-          <a:xfrm>
-            <a:off x="0" y="0"/>
-            <a:ext cx="2971800" cy="458788"/>
-          </a:xfrm>
-          <a:prstGeom prst="rect">
-            <a:avLst/>
-          </a:prstGeom>
-        </p:spPr>
-        <p:txBody>
-          <a:bodyPr vert="horz" lIns="91440" tIns="45720" rIns="91440" bIns="45720" rtlCol="0"/>
-          <a:lstStyle>
-            <a:lvl1pPr algn="l">
-              <a:defRPr sz="1200"/>
-            </a:lvl1pPr>
-          </a:lstStyle>
-          <a:p>
-            <a:endParaRPr lang="en-US"/>
-          </a:p>
-        </p:txBody>
-      </p:sp>
-      <p:sp>
-        <p:nvSpPr>
-          <p:cNvPr id="3" name="Date Placeholder 2"/>
-          <p:cNvSpPr>
-            <a:spLocks noGrp="1"/>
-          </p:cNvSpPr>
-          <p:nvPr>
-            <p:ph type="dt" idx="1"/>
-          </p:nvPr>
-        </p:nvSpPr>
-        <p:spPr>
-          <a:xfrm>
-            <a:off x="3884613" y="0"/>
-            <a:ext cx="2971800" cy="458788"/>
-          </a:xfrm>
-          <a:prstGeom prst="rect">
-            <a:avLst/>
-          </a:prstGeom>
-        </p:spPr>
-        <p:txBody>
-          <a:bodyPr vert="horz" lIns="91440" tIns="45720" rIns="91440" bIns="45720" rtlCol="0"/>
-          <a:lstStyle>
-            <a:lvl1pPr algn="r">
-              <a:defRPr sz="1200"/>
-            </a:lvl1pPr>
-          </a:lstStyle>
-          <a:p>
-            <a:fld id="{5282F153-3F37-0F45-9E97-73ACFA13230C}" type="datetimeFigureOut">
-              <a:rPr lang="en-US"/>
-              <a:t>7/23/19</a:t>
-            </a:fld>
-            <a:endParaRPr lang="en-US"/>
-          </a:p>
-        </p:txBody>
-      </p:sp>
-      <p:sp>
-        <p:nvSpPr>
-          <p:cNvPr id="4" name="Slide Image Placeholder 3"/>
-          <p:cNvSpPr>
-            <a:spLocks noGrp="1" noRot="1" noChangeAspect="1"/>
-          </p:cNvSpPr>
-          <p:nvPr>
-            <p:ph type="sldImg" idx="2"/>
-          </p:nvPr>
-        </p:nvSpPr>
-        <p:spPr>
-          <a:xfrm>
-            <a:off x="685800" y="1143000"/>
-            <a:ext cx="5486400" cy="3086100"/>
-          </a:xfrm>
-          <a:prstGeom prst="rect">
-            <a:avLst/>
-          </a:prstGeom>
-          <a:noFill/>
-          <a:ln w="12700">
-            <a:solidFill>
-              <a:prstClr val="black"/>
-            </a:solidFill>
-          </a:ln>
-        </p:spPr>
-        <p:txBody>
-          <a:bodyPr vert="horz" lIns="91440" tIns="45720" rIns="91440" bIns="45720" rtlCol="0" anchor="ctr"/>
-          <a:lstStyle/>
-          <a:p>
-            <a:endParaRPr lang="en-US"/>
-          </a:p>
-        </p:txBody>
-      </p:sp>
-      <p:sp>
-        <p:nvSpPr>
-          <p:cNvPr id="5" name="Notes Placeholder 4"/>
-          <p:cNvSpPr>
-            <a:spLocks noGrp="1"/>
-          </p:cNvSpPr>
-          <p:nvPr>
-            <p:ph type="body" sz="quarter" idx="3"/>
-          </p:nvPr>
-        </p:nvSpPr>
-        <p:spPr>
-          <a:xfrm>
-            <a:off x="685800" y="4400550"/>
-            <a:ext cx="5486400" cy="3600450"/>
-          </a:xfrm>
-          <a:prstGeom prst="rect">
-            <a:avLst/>
-          </a:prstGeom>
-        </p:spPr>
-        <p:txBody>
-          <a:bodyPr vert="horz" lIns="91440" tIns="45720" rIns="91440" bIns="45720" rtlCol="0"/>
-          <a:lstStyle/>
-          <a:p>
-            <a:pPr lvl="0"/>
-            <a:r>
-              <a:rPr lang="en-US"/>
-              <a:t>Click to edit Master text styles</a:t>
-            </a:r>
-          </a:p>
-          <a:p>
-            <a:pPr lvl="1"/>
-            <a:r>
-              <a:rPr lang="en-US"/>
-              <a:t>Second level</a:t>
-            </a:r>
-          </a:p>
-          <a:p>
-            <a:pPr lvl="2"/>
-            <a:r>
-              <a:rPr lang="en-US"/>
-              <a:t>Third level</a:t>
-            </a:r>
-          </a:p>
-          <a:p>
-            <a:pPr lvl="3"/>
-            <a:r>
-              <a:rPr lang="en-US"/>
-              <a:t>Fourth level</a:t>
-            </a:r>
-          </a:p>
-          <a:p>
-            <a:pPr lvl="4"/>
-            <a:r>
-              <a:rPr lang="en-US"/>
-              <a:t>Fifth level</a:t>
-            </a:r>
-          </a:p>
-        </p:txBody>
-      </p:sp>
-      <p:sp>
-        <p:nvSpPr>
-          <p:cNvPr id="6" name="Footer Placeholder 5"/>
-          <p:cNvSpPr>
-            <a:spLocks noGrp="1"/>
-          </p:cNvSpPr>
-          <p:nvPr>
-            <p:ph type="ftr" sz="quarter" idx="4"/>
-          </p:nvPr>
-        </p:nvSpPr>
-        <p:spPr>
-          <a:xfrm>
-            <a:off x="0" y="8685213"/>
-            <a:ext cx="2971800" cy="458787"/>
-          </a:xfrm>
-          <a:prstGeom prst="rect">
-            <a:avLst/>
-          </a:prstGeom>
-        </p:spPr>
-        <p:txBody>
-          <a:bodyPr vert="horz" lIns="91440" tIns="45720" rIns="91440" bIns="45720" rtlCol="0" anchor="b"/>
-          <a:lstStyle>
-            <a:lvl1pPr algn="l">
-              <a:defRPr sz="1200"/>
-            </a:lvl1pPr>
-          </a:lstStyle>
-          <a:p>
-            <a:endParaRPr lang="en-US"/>
-          </a:p>
-        </p:txBody>
-      </p:sp>
-      <p:sp>
-        <p:nvSpPr>
-          <p:cNvPr id="7" name="Slide Number Placeholder 6"/>
-          <p:cNvSpPr>
-            <a:spLocks noGrp="1"/>
-          </p:cNvSpPr>
-          <p:nvPr>
-            <p:ph type="sldNum" sz="quarter" idx="5"/>
-          </p:nvPr>
-        </p:nvSpPr>
-        <p:spPr>
-          <a:xfrm>
-            <a:off x="3884613" y="8685213"/>
-            <a:ext cx="2971800" cy="458787"/>
-          </a:xfrm>
-          <a:prstGeom prst="rect">
-            <a:avLst/>
-          </a:prstGeom>
-        </p:spPr>
-        <p:txBody>
-          <a:bodyPr vert="horz" lIns="91440" tIns="45720" rIns="91440" bIns="45720" rtlCol="0" anchor="b"/>
-          <a:lstStyle>
-            <a:lvl1pPr algn="r">
-              <a:defRPr sz="1200"/>
-            </a:lvl1pPr>
-          </a:lstStyle>
-          <a:p>
-            <a:fld id="{CE5E9CC1-C706-0F49-92D6-E571CC5EEA8F}" type="slidenum">
-              <a:rPr lang="en-US"/>
-              <a:t>‹#›</a:t>
-            </a:fld>
-            <a:endParaRPr lang="en-US"/>
-          </a:p>
-        </p:txBody>
-      </p:sp>
     </p:spTree>
     <p:extLst>
       <p:ext uri="{BB962C8B-B14F-4D97-AF65-F5344CB8AC3E}">
-        <p14:creationId xmlns:p14="http://schemas.microsoft.com/office/powerpoint/2010/main" val="1024086991"/>
+        <p14:creationId xmlns:p14="http://schemas.microsoft.com/office/powerpoint/2010/main" val="3438515277"/>
       </p:ext>
     </p:extLst>
   </p:cSld>
   <p:clrMap bg1="lt1" tx1="dk1" bg2="lt2" tx2="dk2" accent1="accent1" accent2="accent2" accent3="accent3" accent4="accent4" accent5="accent5" accent6="accent6" hlink="hlink" folHlink="folHlink"/>
   <p:notesStyle>
-    <a:lvl1pPr marL="0" algn="l" defTabSz="914400" rtl="0" eaLnBrk="1" latinLnBrk="0" hangingPunct="1">
+    <a:lvl1pPr marL="0" algn="l" defTabSz="914400" rtl="0" eaLnBrk="1" latinLnBrk="1" hangingPunct="1">
       <a:defRPr sz="1200" kern="1200">
         <a:solidFill>
           <a:schemeClr val="tx1"/>
@@ -376,7 +157,7 @@
         <a:cs typeface="+mn-cs"/>
       </a:defRPr>
     </a:lvl1pPr>
-    <a:lvl2pPr marL="457200" algn="l" defTabSz="914400" rtl="0" eaLnBrk="1" latinLnBrk="0" hangingPunct="1">
+    <a:lvl2pPr marL="457200" algn="l" defTabSz="914400" rtl="0" eaLnBrk="1" latinLnBrk="1" hangingPunct="1">
       <a:defRPr sz="1200" kern="1200">
         <a:solidFill>
           <a:schemeClr val="tx1"/>
@@ -386,7 +167,7 @@
         <a:cs typeface="+mn-cs"/>
       </a:defRPr>
     </a:lvl2pPr>
-    <a:lvl3pPr marL="914400" algn="l" defTabSz="914400" rtl="0" eaLnBrk="1" latinLnBrk="0" hangingPunct="1">
+    <a:lvl3pPr marL="914400" algn="l" defTabSz="914400" rtl="0" eaLnBrk="1" latinLnBrk="1" hangingPunct="1">
       <a:defRPr sz="1200" kern="1200">
         <a:solidFill>
           <a:schemeClr val="tx1"/>
@@ -396,7 +177,7 @@
         <a:cs typeface="+mn-cs"/>
       </a:defRPr>
     </a:lvl3pPr>
-    <a:lvl4pPr marL="1371600" algn="l" defTabSz="914400" rtl="0" eaLnBrk="1" latinLnBrk="0" hangingPunct="1">
+    <a:lvl4pPr marL="1371600" algn="l" defTabSz="914400" rtl="0" eaLnBrk="1" latinLnBrk="1" hangingPunct="1">
       <a:defRPr sz="1200" kern="1200">
         <a:solidFill>
           <a:schemeClr val="tx1"/>
@@ -406,7 +187,7 @@
         <a:cs typeface="+mn-cs"/>
       </a:defRPr>
     </a:lvl4pPr>
-    <a:lvl5pPr marL="1828800" algn="l" defTabSz="914400" rtl="0" eaLnBrk="1" latinLnBrk="0" hangingPunct="1">
+    <a:lvl5pPr marL="1828800" algn="l" defTabSz="914400" rtl="0" eaLnBrk="1" latinLnBrk="1" hangingPunct="1">
       <a:defRPr sz="1200" kern="1200">
         <a:solidFill>
           <a:schemeClr val="tx1"/>
@@ -416,7 +197,7 @@
         <a:cs typeface="+mn-cs"/>
       </a:defRPr>
     </a:lvl5pPr>
-    <a:lvl6pPr marL="2286000" algn="l" defTabSz="914400" rtl="0" eaLnBrk="1" latinLnBrk="0" hangingPunct="1">
+    <a:lvl6pPr marL="2286000" algn="l" defTabSz="914400" rtl="0" eaLnBrk="1" latinLnBrk="1" hangingPunct="1">
       <a:defRPr sz="1200" kern="1200">
         <a:solidFill>
           <a:schemeClr val="tx1"/>
@@ -426,7 +207,7 @@
         <a:cs typeface="+mn-cs"/>
       </a:defRPr>
     </a:lvl6pPr>
-    <a:lvl7pPr marL="2743200" algn="l" defTabSz="914400" rtl="0" eaLnBrk="1" latinLnBrk="0" hangingPunct="1">
+    <a:lvl7pPr marL="2743200" algn="l" defTabSz="914400" rtl="0" eaLnBrk="1" latinLnBrk="1" hangingPunct="1">
       <a:defRPr sz="1200" kern="1200">
         <a:solidFill>
           <a:schemeClr val="tx1"/>
@@ -436,7 +217,7 @@
         <a:cs typeface="+mn-cs"/>
       </a:defRPr>
     </a:lvl7pPr>
-    <a:lvl8pPr marL="3200400" algn="l" defTabSz="914400" rtl="0" eaLnBrk="1" latinLnBrk="0" hangingPunct="1">
+    <a:lvl8pPr marL="3200400" algn="l" defTabSz="914400" rtl="0" eaLnBrk="1" latinLnBrk="1" hangingPunct="1">
       <a:defRPr sz="1200" kern="1200">
         <a:solidFill>
           <a:schemeClr val="tx1"/>
@@ -446,7 +227,7 @@
         <a:cs typeface="+mn-cs"/>
       </a:defRPr>
     </a:lvl8pPr>
-    <a:lvl9pPr marL="3657600" algn="l" defTabSz="914400" rtl="0" eaLnBrk="1" latinLnBrk="0" hangingPunct="1">
+    <a:lvl9pPr marL="3657600" algn="l" defTabSz="914400" rtl="0" eaLnBrk="1" latinLnBrk="1" hangingPunct="1">
       <a:defRPr sz="1200" kern="1200">
         <a:solidFill>
           <a:schemeClr val="tx1"/>
@@ -504,10 +285,6 @@
           <a:bodyPr/>
           <a:lstStyle/>
           <a:p>
-            <a:r>
-              <a:rPr lang="en-US" dirty="0"/>
-              <a:t/>
-            </a:r>
             <a:endParaRPr lang="en-US" dirty="0"/>
           </a:p>
         </p:txBody>
@@ -592,10 +369,6 @@
           <a:bodyPr/>
           <a:lstStyle/>
           <a:p>
-            <a:r>
-              <a:rPr lang="en-US" dirty="0"/>
-              <a:t/>
-            </a:r>
             <a:endParaRPr lang="en-US" dirty="0"/>
           </a:p>
         </p:txBody>
@@ -680,10 +453,6 @@
           <a:bodyPr/>
           <a:lstStyle/>
           <a:p>
-            <a:r>
-              <a:rPr lang="en-US" dirty="0"/>
-              <a:t/>
-            </a:r>
             <a:endParaRPr lang="en-US" dirty="0"/>
           </a:p>
         </p:txBody>
@@ -768,10 +537,6 @@
           <a:bodyPr/>
           <a:lstStyle/>
           <a:p>
-            <a:r>
-              <a:rPr lang="en-US" dirty="0"/>
-              <a:t/>
-            </a:r>
             <a:endParaRPr lang="en-US" dirty="0"/>
           </a:p>
         </p:txBody>
@@ -856,10 +621,6 @@
           <a:bodyPr/>
           <a:lstStyle/>
           <a:p>
-            <a:r>
-              <a:rPr lang="en-US" dirty="0"/>
-              <a:t/>
-            </a:r>
             <a:endParaRPr lang="en-US" dirty="0"/>
           </a:p>
         </p:txBody>
@@ -933,6 +694,11 @@
 <file path=ppt/slideMasters/slideMaster1.xml><?xml version="1.0" encoding="utf-8"?>
 <p:sldMaster xmlns:a="http://schemas.openxmlformats.org/drawingml/2006/main" xmlns:r="http://schemas.openxmlformats.org/officeDocument/2006/relationships" xmlns:p="http://schemas.openxmlformats.org/presentationml/2006/main">
   <p:cSld>
+    <p:bg>
+      <p:bgRef idx="1001">
+        <a:schemeClr val="bg1"/>
+      </p:bgRef>
+    </p:bg>
     <p:spTree>
       <p:nvGrpSpPr>
         <p:cNvPr id="1" name=""/>
@@ -1215,6 +981,7 @@
         <a:solidFill>
           <a:srgbClr val="FAFBFD"/>
         </a:solidFill>
+        <a:effectLst/>
       </p:bgPr>
     </p:bg>
     <p:spTree>
@@ -1254,7 +1021,7 @@
           </a:bodyPr>
           <a:lstStyle/>
           <a:p>
-            <a:pPr algn="l" indent="0" marL="0">
+            <a:pPr marL="0" indent="0" algn="l">
               <a:buNone/>
             </a:pPr>
             <a:r>
@@ -1295,7 +1062,7 @@
           </a:bodyPr>
           <a:lstStyle/>
           <a:p>
-            <a:pPr algn="l" indent="0" marL="0">
+            <a:pPr marL="0" indent="0" algn="l">
               <a:buNone/>
             </a:pPr>
             <a:r>
@@ -1363,7 +1130,7 @@
           </a:bodyPr>
           <a:lstStyle/>
           <a:p>
-            <a:pPr algn="ctr" indent="0" marL="0">
+            <a:pPr marL="0" indent="0" algn="ctr">
               <a:buNone/>
             </a:pPr>
             <a:r>
@@ -1380,7 +1147,7 @@
             <a:endParaRPr lang="en-US" sz="1400" dirty="0"/>
           </a:p>
           <a:p>
-            <a:pPr algn="ctr" indent="0" marL="0">
+            <a:pPr marL="0" indent="0" algn="ctr">
               <a:buNone/>
             </a:pPr>
             <a:r>
@@ -1448,7 +1215,7 @@
           </a:bodyPr>
           <a:lstStyle/>
           <a:p>
-            <a:pPr algn="ctr" indent="0" marL="0">
+            <a:pPr marL="0" indent="0" algn="ctr">
               <a:buNone/>
             </a:pPr>
             <a:r>
@@ -1465,7 +1232,7 @@
             <a:endParaRPr lang="en-US" sz="1400" dirty="0"/>
           </a:p>
           <a:p>
-            <a:pPr algn="ctr" indent="0" marL="0">
+            <a:pPr marL="0" indent="0" algn="ctr">
               <a:buNone/>
             </a:pPr>
             <a:r>
@@ -1533,7 +1300,7 @@
           </a:bodyPr>
           <a:lstStyle/>
           <a:p>
-            <a:pPr algn="ctr" indent="0" marL="0">
+            <a:pPr marL="0" indent="0" algn="ctr">
               <a:buNone/>
             </a:pPr>
             <a:r>
@@ -1550,7 +1317,7 @@
             <a:endParaRPr lang="en-US" sz="1400" dirty="0"/>
           </a:p>
           <a:p>
-            <a:pPr algn="ctr" indent="0" marL="0">
+            <a:pPr marL="0" indent="0" algn="ctr">
               <a:buNone/>
             </a:pPr>
             <a:r>
@@ -1618,7 +1385,7 @@
           </a:bodyPr>
           <a:lstStyle/>
           <a:p>
-            <a:pPr algn="ctr" indent="0" marL="0">
+            <a:pPr marL="0" indent="0" algn="ctr">
               <a:buNone/>
             </a:pPr>
             <a:r>
@@ -1635,7 +1402,7 @@
             <a:endParaRPr lang="en-US" sz="1400" dirty="0"/>
           </a:p>
           <a:p>
-            <a:pPr algn="ctr" indent="0" marL="0">
+            <a:pPr marL="0" indent="0" algn="ctr">
               <a:buNone/>
             </a:pPr>
             <a:r>
@@ -1703,7 +1470,7 @@
           </a:bodyPr>
           <a:lstStyle/>
           <a:p>
-            <a:pPr algn="ctr" indent="0" marL="0">
+            <a:pPr marL="0" indent="0" algn="ctr">
               <a:buNone/>
             </a:pPr>
             <a:r>
@@ -1744,7 +1511,7 @@
           </a:bodyPr>
           <a:lstStyle/>
           <a:p>
-            <a:pPr algn="l" indent="0" marL="0">
+            <a:pPr marL="0" indent="0" algn="l">
               <a:buNone/>
             </a:pPr>
             <a:r>
@@ -1785,7 +1552,7 @@
           </a:bodyPr>
           <a:lstStyle/>
           <a:p>
-            <a:pPr algn="ctr" indent="0" marL="0">
+            <a:pPr marL="0" indent="0" algn="ctr">
               <a:buNone/>
             </a:pPr>
             <a:r>
@@ -1819,6 +1586,7 @@
         <a:solidFill>
           <a:srgbClr val="FAFBFD"/>
         </a:solidFill>
+        <a:effectLst/>
       </p:bgPr>
     </p:bg>
     <p:spTree>
@@ -1858,7 +1626,7 @@
           </a:bodyPr>
           <a:lstStyle/>
           <a:p>
-            <a:pPr algn="l" indent="0" marL="0">
+            <a:pPr marL="0" indent="0" algn="l">
               <a:buNone/>
             </a:pPr>
             <a:r>
@@ -1899,7 +1667,7 @@
           </a:bodyPr>
           <a:lstStyle/>
           <a:p>
-            <a:pPr algn="l" indent="0" marL="0">
+            <a:pPr marL="0" indent="0" algn="l">
               <a:buNone/>
             </a:pPr>
             <a:r>
@@ -1990,7 +1758,7 @@
           </a:bodyPr>
           <a:lstStyle/>
           <a:p>
-            <a:pPr algn="ctr" indent="0" marL="0">
+            <a:pPr marL="0" indent="0" algn="ctr">
               <a:buNone/>
             </a:pPr>
             <a:r>
@@ -2007,7 +1775,7 @@
             <a:endParaRPr lang="en-US" sz="1150" dirty="0"/>
           </a:p>
           <a:p>
-            <a:pPr algn="ctr" indent="0" marL="0">
+            <a:pPr marL="0" indent="0" algn="ctr">
               <a:buNone/>
             </a:pPr>
             <a:r>
@@ -2100,7 +1868,7 @@
           </a:bodyPr>
           <a:lstStyle/>
           <a:p>
-            <a:pPr algn="ctr" indent="0" marL="0">
+            <a:pPr marL="0" indent="0" algn="ctr">
               <a:buNone/>
             </a:pPr>
             <a:r>
@@ -2117,7 +1885,7 @@
             <a:endParaRPr lang="en-US" sz="1150" dirty="0"/>
           </a:p>
           <a:p>
-            <a:pPr algn="ctr" indent="0" marL="0">
+            <a:pPr marL="0" indent="0" algn="ctr">
               <a:buNone/>
             </a:pPr>
             <a:r>
@@ -2210,7 +1978,7 @@
           </a:bodyPr>
           <a:lstStyle/>
           <a:p>
-            <a:pPr algn="ctr" indent="0" marL="0">
+            <a:pPr marL="0" indent="0" algn="ctr">
               <a:buNone/>
             </a:pPr>
             <a:r>
@@ -2227,7 +1995,7 @@
             <a:endParaRPr lang="en-US" sz="1150" dirty="0"/>
           </a:p>
           <a:p>
-            <a:pPr algn="ctr" indent="0" marL="0">
+            <a:pPr marL="0" indent="0" algn="ctr">
               <a:buNone/>
             </a:pPr>
             <a:r>
@@ -2320,7 +2088,7 @@
           </a:bodyPr>
           <a:lstStyle/>
           <a:p>
-            <a:pPr algn="ctr" indent="0" marL="0">
+            <a:pPr marL="0" indent="0" algn="ctr">
               <a:buNone/>
             </a:pPr>
             <a:r>
@@ -2337,7 +2105,7 @@
             <a:endParaRPr lang="en-US" sz="1150" dirty="0"/>
           </a:p>
           <a:p>
-            <a:pPr algn="ctr" indent="0" marL="0">
+            <a:pPr marL="0" indent="0" algn="ctr">
               <a:buNone/>
             </a:pPr>
             <a:r>
@@ -2364,7 +2132,7 @@
         <p:spPr>
           <a:xfrm>
             <a:off x="8412480" y="1993392"/>
-            <a:ext cx="502920" cy="-393192"/>
+            <a:ext cx="502920" cy="0"/>
           </a:xfrm>
           <a:prstGeom prst="line">
             <a:avLst/>
@@ -2455,7 +2223,7 @@
           </a:bodyPr>
           <a:lstStyle/>
           <a:p>
-            <a:pPr algn="ctr" indent="0" marL="0">
+            <a:pPr marL="0" indent="0" algn="ctr">
               <a:buNone/>
             </a:pPr>
             <a:r>
@@ -2472,7 +2240,7 @@
             <a:endParaRPr lang="en-US" sz="1100" dirty="0"/>
           </a:p>
           <a:p>
-            <a:pPr algn="ctr" indent="0" marL="0">
+            <a:pPr marL="0" indent="0" algn="ctr">
               <a:buNone/>
             </a:pPr>
             <a:r>
@@ -2540,7 +2308,7 @@
           </a:bodyPr>
           <a:lstStyle/>
           <a:p>
-            <a:pPr algn="ctr" indent="0" marL="0">
+            <a:pPr marL="0" indent="0" algn="ctr">
               <a:buNone/>
             </a:pPr>
             <a:r>
@@ -2557,7 +2325,7 @@
             <a:endParaRPr lang="en-US" sz="1100" dirty="0"/>
           </a:p>
           <a:p>
-            <a:pPr algn="ctr" indent="0" marL="0">
+            <a:pPr marL="0" indent="0" algn="ctr">
               <a:buNone/>
             </a:pPr>
             <a:r>
@@ -2609,7 +2377,7 @@
         <p:spPr>
           <a:xfrm>
             <a:off x="10287000" y="2798064"/>
-            <a:ext cx="502920" cy="-493776"/>
+            <a:ext cx="502920" cy="0"/>
           </a:xfrm>
           <a:prstGeom prst="line">
             <a:avLst/>
@@ -2675,7 +2443,7 @@
           </a:bodyPr>
           <a:lstStyle/>
           <a:p>
-            <a:pPr algn="ctr" indent="0" marL="0">
+            <a:pPr marL="0" indent="0" algn="ctr">
               <a:buNone/>
             </a:pPr>
             <a:r>
@@ -2692,7 +2460,7 @@
             <a:endParaRPr lang="en-US" sz="1000" dirty="0"/>
           </a:p>
           <a:p>
-            <a:pPr algn="ctr" indent="0" marL="0">
+            <a:pPr marL="0" indent="0" algn="ctr">
               <a:buNone/>
             </a:pPr>
             <a:r>
@@ -2760,7 +2528,7 @@
           </a:bodyPr>
           <a:lstStyle/>
           <a:p>
-            <a:pPr algn="ctr" indent="0" marL="0">
+            <a:pPr marL="0" indent="0" algn="ctr">
               <a:buNone/>
             </a:pPr>
             <a:r>
@@ -2801,7 +2569,7 @@
           </a:bodyPr>
           <a:lstStyle/>
           <a:p>
-            <a:pPr algn="ctr" indent="0" marL="0">
+            <a:pPr marL="0" indent="0" algn="ctr">
               <a:buNone/>
             </a:pPr>
             <a:r>
@@ -2835,6 +2603,7 @@
         <a:solidFill>
           <a:srgbClr val="FAFBFD"/>
         </a:solidFill>
+        <a:effectLst/>
       </p:bgPr>
     </p:bg>
     <p:spTree>
@@ -2874,7 +2643,7 @@
           </a:bodyPr>
           <a:lstStyle/>
           <a:p>
-            <a:pPr algn="l" indent="0" marL="0">
+            <a:pPr marL="0" indent="0" algn="l">
               <a:buNone/>
             </a:pPr>
             <a:r>
@@ -2915,7 +2684,7 @@
           </a:bodyPr>
           <a:lstStyle/>
           <a:p>
-            <a:pPr algn="l" indent="0" marL="0">
+            <a:pPr marL="0" indent="0" algn="l">
               <a:buNone/>
             </a:pPr>
             <a:r>
@@ -3006,7 +2775,7 @@
           </a:bodyPr>
           <a:lstStyle/>
           <a:p>
-            <a:pPr algn="ctr" indent="0" marL="0">
+            <a:pPr marL="0" indent="0" algn="ctr">
               <a:buNone/>
             </a:pPr>
             <a:r>
@@ -3023,7 +2792,7 @@
             <a:endParaRPr lang="en-US" sz="1150" dirty="0"/>
           </a:p>
           <a:p>
-            <a:pPr algn="ctr" indent="0" marL="0">
+            <a:pPr marL="0" indent="0" algn="ctr">
               <a:buNone/>
             </a:pPr>
             <a:r>
@@ -3116,7 +2885,7 @@
           </a:bodyPr>
           <a:lstStyle/>
           <a:p>
-            <a:pPr algn="ctr" indent="0" marL="0">
+            <a:pPr marL="0" indent="0" algn="ctr">
               <a:buNone/>
             </a:pPr>
             <a:r>
@@ -3133,7 +2902,7 @@
             <a:endParaRPr lang="en-US" sz="1150" dirty="0"/>
           </a:p>
           <a:p>
-            <a:pPr algn="ctr" indent="0" marL="0">
+            <a:pPr marL="0" indent="0" algn="ctr">
               <a:buNone/>
             </a:pPr>
             <a:r>
@@ -3226,7 +2995,7 @@
           </a:bodyPr>
           <a:lstStyle/>
           <a:p>
-            <a:pPr algn="ctr" indent="0" marL="0">
+            <a:pPr marL="0" indent="0" algn="ctr">
               <a:buNone/>
             </a:pPr>
             <a:r>
@@ -3243,7 +3012,7 @@
             <a:endParaRPr lang="en-US" sz="1150" dirty="0"/>
           </a:p>
           <a:p>
-            <a:pPr algn="ctr" indent="0" marL="0">
+            <a:pPr marL="0" indent="0" algn="ctr">
               <a:buNone/>
             </a:pPr>
             <a:r>
@@ -3336,7 +3105,7 @@
           </a:bodyPr>
           <a:lstStyle/>
           <a:p>
-            <a:pPr algn="ctr" indent="0" marL="0">
+            <a:pPr marL="0" indent="0" algn="ctr">
               <a:buNone/>
             </a:pPr>
             <a:r>
@@ -3353,7 +3122,7 @@
             <a:endParaRPr lang="en-US" sz="1150" dirty="0"/>
           </a:p>
           <a:p>
-            <a:pPr algn="ctr" indent="0" marL="0">
+            <a:pPr marL="0" indent="0" algn="ctr">
               <a:buNone/>
             </a:pPr>
             <a:r>
@@ -3446,7 +3215,7 @@
           </a:bodyPr>
           <a:lstStyle/>
           <a:p>
-            <a:pPr algn="ctr" indent="0" marL="0">
+            <a:pPr marL="0" indent="0" algn="ctr">
               <a:buNone/>
             </a:pPr>
             <a:r>
@@ -3463,7 +3232,7 @@
             <a:endParaRPr lang="en-US" sz="1150" dirty="0"/>
           </a:p>
           <a:p>
-            <a:pPr algn="ctr" indent="0" marL="0">
+            <a:pPr marL="0" indent="0" algn="ctr">
               <a:buNone/>
             </a:pPr>
             <a:r>
@@ -3556,7 +3325,7 @@
           </a:bodyPr>
           <a:lstStyle/>
           <a:p>
-            <a:pPr algn="ctr" indent="0" marL="0">
+            <a:pPr marL="0" indent="0" algn="ctr">
               <a:buNone/>
             </a:pPr>
             <a:r>
@@ -3573,7 +3342,7 @@
             <a:endParaRPr lang="en-US" sz="1130" dirty="0"/>
           </a:p>
           <a:p>
-            <a:pPr algn="ctr" indent="0" marL="0">
+            <a:pPr marL="0" indent="0" algn="ctr">
               <a:buNone/>
             </a:pPr>
             <a:r>
@@ -3641,7 +3410,7 @@
           </a:bodyPr>
           <a:lstStyle/>
           <a:p>
-            <a:pPr algn="ctr" indent="0" marL="0">
+            <a:pPr marL="0" indent="0" algn="ctr">
               <a:buNone/>
             </a:pPr>
             <a:r>
@@ -3709,7 +3478,7 @@
           </a:bodyPr>
           <a:lstStyle/>
           <a:p>
-            <a:pPr algn="ctr" indent="0" marL="0">
+            <a:pPr marL="0" indent="0" algn="ctr">
               <a:buNone/>
             </a:pPr>
             <a:r>
@@ -3777,7 +3546,7 @@
           </a:bodyPr>
           <a:lstStyle/>
           <a:p>
-            <a:pPr algn="ctr" indent="0" marL="0">
+            <a:pPr marL="0" indent="0" algn="ctr">
               <a:buNone/>
             </a:pPr>
             <a:r>
@@ -3845,7 +3614,7 @@
           </a:bodyPr>
           <a:lstStyle/>
           <a:p>
-            <a:pPr algn="ctr" indent="0" marL="0">
+            <a:pPr marL="0" indent="0" algn="ctr">
               <a:buNone/>
             </a:pPr>
             <a:r>
@@ -3913,7 +3682,7 @@
           </a:bodyPr>
           <a:lstStyle/>
           <a:p>
-            <a:pPr algn="ctr" indent="0" marL="0">
+            <a:pPr marL="0" indent="0" algn="ctr">
               <a:buNone/>
             </a:pPr>
             <a:r>
@@ -3981,7 +3750,7 @@
           </a:bodyPr>
           <a:lstStyle/>
           <a:p>
-            <a:pPr algn="ctr" indent="0" marL="0">
+            <a:pPr marL="0" indent="0" algn="ctr">
               <a:buNone/>
             </a:pPr>
             <a:r>
@@ -4049,7 +3818,7 @@
           </a:bodyPr>
           <a:lstStyle/>
           <a:p>
-            <a:pPr algn="ctr" indent="0" marL="0">
+            <a:pPr marL="0" indent="0" algn="ctr">
               <a:buNone/>
             </a:pPr>
             <a:r>
@@ -4117,7 +3886,7 @@
           </a:bodyPr>
           <a:lstStyle/>
           <a:p>
-            <a:pPr algn="ctr" indent="0" marL="0">
+            <a:pPr marL="0" indent="0" algn="ctr">
               <a:buNone/>
             </a:pPr>
             <a:r>
@@ -4185,7 +3954,7 @@
           </a:bodyPr>
           <a:lstStyle/>
           <a:p>
-            <a:pPr algn="ctr" indent="0" marL="0">
+            <a:pPr marL="0" indent="0" algn="ctr">
               <a:buNone/>
             </a:pPr>
             <a:r>
@@ -4253,7 +4022,7 @@
           </a:bodyPr>
           <a:lstStyle/>
           <a:p>
-            <a:pPr algn="ctr" indent="0" marL="0">
+            <a:pPr marL="0" indent="0" algn="ctr">
               <a:buNone/>
             </a:pPr>
             <a:r>
@@ -4321,7 +4090,7 @@
           </a:bodyPr>
           <a:lstStyle/>
           <a:p>
-            <a:pPr algn="ctr" indent="0" marL="0">
+            <a:pPr marL="0" indent="0" algn="ctr">
               <a:buNone/>
             </a:pPr>
             <a:r>
@@ -4389,7 +4158,7 @@
           </a:bodyPr>
           <a:lstStyle/>
           <a:p>
-            <a:pPr algn="ctr" indent="0" marL="0">
+            <a:pPr marL="0" indent="0" algn="ctr">
               <a:buNone/>
             </a:pPr>
             <a:r>
@@ -4430,7 +4199,7 @@
           </a:bodyPr>
           <a:lstStyle/>
           <a:p>
-            <a:pPr algn="ctr" indent="0" marL="0">
+            <a:pPr marL="0" indent="0" algn="ctr">
               <a:buNone/>
             </a:pPr>
             <a:r>
@@ -4464,6 +4233,7 @@
         <a:solidFill>
           <a:srgbClr val="FAFBFD"/>
         </a:solidFill>
+        <a:effectLst/>
       </p:bgPr>
     </p:bg>
     <p:spTree>
@@ -4503,7 +4273,7 @@
           </a:bodyPr>
           <a:lstStyle/>
           <a:p>
-            <a:pPr algn="l" indent="0" marL="0">
+            <a:pPr marL="0" indent="0" algn="l">
               <a:buNone/>
             </a:pPr>
             <a:r>
@@ -4544,7 +4314,7 @@
           </a:bodyPr>
           <a:lstStyle/>
           <a:p>
-            <a:pPr algn="l" indent="0" marL="0">
+            <a:pPr marL="0" indent="0" algn="l">
               <a:buNone/>
             </a:pPr>
             <a:r>
@@ -4635,7 +4405,7 @@
           </a:bodyPr>
           <a:lstStyle/>
           <a:p>
-            <a:pPr algn="ctr" indent="0" marL="0">
+            <a:pPr marL="0" indent="0" algn="ctr">
               <a:buNone/>
             </a:pPr>
             <a:r>
@@ -4703,7 +4473,7 @@
           </a:bodyPr>
           <a:lstStyle/>
           <a:p>
-            <a:pPr algn="ctr" indent="0" marL="0">
+            <a:pPr marL="0" indent="0" algn="ctr">
               <a:buNone/>
             </a:pPr>
             <a:r>
@@ -4771,7 +4541,7 @@
           </a:bodyPr>
           <a:lstStyle/>
           <a:p>
-            <a:pPr algn="ctr" indent="0" marL="0">
+            <a:pPr marL="0" indent="0" algn="ctr">
               <a:buNone/>
             </a:pPr>
             <a:r>
@@ -4839,7 +4609,7 @@
           </a:bodyPr>
           <a:lstStyle/>
           <a:p>
-            <a:pPr algn="ctr" indent="0" marL="0">
+            <a:pPr marL="0" indent="0" algn="ctr">
               <a:buNone/>
             </a:pPr>
             <a:r>
@@ -4907,7 +4677,7 @@
           </a:bodyPr>
           <a:lstStyle/>
           <a:p>
-            <a:pPr algn="ctr" indent="0" marL="0">
+            <a:pPr marL="0" indent="0" algn="ctr">
               <a:buNone/>
             </a:pPr>
             <a:r>
@@ -4975,7 +4745,7 @@
           </a:bodyPr>
           <a:lstStyle/>
           <a:p>
-            <a:pPr algn="ctr" indent="0" marL="0">
+            <a:pPr marL="0" indent="0" algn="ctr">
               <a:buNone/>
             </a:pPr>
             <a:r>
@@ -5043,7 +4813,7 @@
           </a:bodyPr>
           <a:lstStyle/>
           <a:p>
-            <a:pPr algn="ctr" indent="0" marL="0">
+            <a:pPr marL="0" indent="0" algn="ctr">
               <a:buNone/>
             </a:pPr>
             <a:r>
@@ -5111,7 +4881,7 @@
           </a:bodyPr>
           <a:lstStyle/>
           <a:p>
-            <a:pPr algn="ctr" indent="0" marL="0">
+            <a:pPr marL="0" indent="0" algn="ctr">
               <a:buNone/>
             </a:pPr>
             <a:r>
@@ -5179,7 +4949,7 @@
           </a:bodyPr>
           <a:lstStyle/>
           <a:p>
-            <a:pPr algn="ctr" indent="0" marL="0">
+            <a:pPr marL="0" indent="0" algn="ctr">
               <a:buNone/>
             </a:pPr>
             <a:r>
@@ -5247,7 +5017,7 @@
           </a:bodyPr>
           <a:lstStyle/>
           <a:p>
-            <a:pPr algn="ctr" indent="0" marL="0">
+            <a:pPr marL="0" indent="0" algn="ctr">
               <a:buNone/>
             </a:pPr>
             <a:r>
@@ -5315,7 +5085,7 @@
           </a:bodyPr>
           <a:lstStyle/>
           <a:p>
-            <a:pPr algn="ctr" indent="0" marL="0">
+            <a:pPr marL="0" indent="0" algn="ctr">
               <a:buNone/>
             </a:pPr>
             <a:r>
@@ -5383,7 +5153,7 @@
           </a:bodyPr>
           <a:lstStyle/>
           <a:p>
-            <a:pPr algn="ctr" indent="0" marL="0">
+            <a:pPr marL="0" indent="0" algn="ctr">
               <a:buNone/>
             </a:pPr>
             <a:r>
@@ -5451,7 +5221,7 @@
           </a:bodyPr>
           <a:lstStyle/>
           <a:p>
-            <a:pPr algn="ctr" indent="0" marL="0">
+            <a:pPr marL="0" indent="0" algn="ctr">
               <a:buNone/>
             </a:pPr>
             <a:r>
@@ -5519,7 +5289,7 @@
           </a:bodyPr>
           <a:lstStyle/>
           <a:p>
-            <a:pPr algn="ctr" indent="0" marL="0">
+            <a:pPr marL="0" indent="0" algn="ctr">
               <a:buNone/>
             </a:pPr>
             <a:r>
@@ -5587,7 +5357,7 @@
           </a:bodyPr>
           <a:lstStyle/>
           <a:p>
-            <a:pPr algn="ctr" indent="0" marL="0">
+            <a:pPr marL="0" indent="0" algn="ctr">
               <a:buNone/>
             </a:pPr>
             <a:r>
@@ -5655,7 +5425,7 @@
           </a:bodyPr>
           <a:lstStyle/>
           <a:p>
-            <a:pPr algn="ctr" indent="0" marL="0">
+            <a:pPr marL="0" indent="0" algn="ctr">
               <a:buNone/>
             </a:pPr>
             <a:r>
@@ -5723,7 +5493,7 @@
           </a:bodyPr>
           <a:lstStyle/>
           <a:p>
-            <a:pPr algn="ctr" indent="0" marL="0">
+            <a:pPr marL="0" indent="0" algn="ctr">
               <a:buNone/>
             </a:pPr>
             <a:r>
@@ -5791,7 +5561,7 @@
           </a:bodyPr>
           <a:lstStyle/>
           <a:p>
-            <a:pPr algn="ctr" indent="0" marL="0">
+            <a:pPr marL="0" indent="0" algn="ctr">
               <a:buNone/>
             </a:pPr>
             <a:r>
@@ -5859,7 +5629,7 @@
           </a:bodyPr>
           <a:lstStyle/>
           <a:p>
-            <a:pPr algn="ctr" indent="0" marL="0">
+            <a:pPr marL="0" indent="0" algn="ctr">
               <a:buNone/>
             </a:pPr>
             <a:r>
@@ -5927,7 +5697,7 @@
           </a:bodyPr>
           <a:lstStyle/>
           <a:p>
-            <a:pPr algn="ctr" indent="0" marL="0">
+            <a:pPr marL="0" indent="0" algn="ctr">
               <a:buNone/>
             </a:pPr>
             <a:r>
@@ -5995,7 +5765,7 @@
           </a:bodyPr>
           <a:lstStyle/>
           <a:p>
-            <a:pPr algn="ctr" indent="0" marL="0">
+            <a:pPr marL="0" indent="0" algn="ctr">
               <a:buNone/>
             </a:pPr>
             <a:r>
@@ -6063,7 +5833,7 @@
           </a:bodyPr>
           <a:lstStyle/>
           <a:p>
-            <a:pPr algn="ctr" indent="0" marL="0">
+            <a:pPr marL="0" indent="0" algn="ctr">
               <a:buNone/>
             </a:pPr>
             <a:r>
@@ -6131,7 +5901,7 @@
           </a:bodyPr>
           <a:lstStyle/>
           <a:p>
-            <a:pPr algn="ctr" indent="0" marL="0">
+            <a:pPr marL="0" indent="0" algn="ctr">
               <a:buNone/>
             </a:pPr>
             <a:r>
@@ -6199,7 +5969,7 @@
           </a:bodyPr>
           <a:lstStyle/>
           <a:p>
-            <a:pPr algn="ctr" indent="0" marL="0">
+            <a:pPr marL="0" indent="0" algn="ctr">
               <a:buNone/>
             </a:pPr>
             <a:r>
@@ -6267,7 +6037,7 @@
           </a:bodyPr>
           <a:lstStyle/>
           <a:p>
-            <a:pPr algn="ctr" indent="0" marL="0">
+            <a:pPr marL="0" indent="0" algn="ctr">
               <a:buNone/>
             </a:pPr>
             <a:r>
@@ -6335,7 +6105,7 @@
           </a:bodyPr>
           <a:lstStyle/>
           <a:p>
-            <a:pPr algn="ctr" indent="0" marL="0">
+            <a:pPr marL="0" indent="0" algn="ctr">
               <a:buNone/>
             </a:pPr>
             <a:r>
@@ -6403,7 +6173,7 @@
           </a:bodyPr>
           <a:lstStyle/>
           <a:p>
-            <a:pPr algn="ctr" indent="0" marL="0">
+            <a:pPr marL="0" indent="0" algn="ctr">
               <a:buNone/>
             </a:pPr>
             <a:r>
@@ -6471,7 +6241,7 @@
           </a:bodyPr>
           <a:lstStyle/>
           <a:p>
-            <a:pPr algn="ctr" indent="0" marL="0">
+            <a:pPr marL="0" indent="0" algn="ctr">
               <a:buNone/>
             </a:pPr>
             <a:r>
@@ -6539,7 +6309,7 @@
           </a:bodyPr>
           <a:lstStyle/>
           <a:p>
-            <a:pPr algn="ctr" indent="0" marL="0">
+            <a:pPr marL="0" indent="0" algn="ctr">
               <a:buNone/>
             </a:pPr>
             <a:r>
@@ -6607,7 +6377,7 @@
           </a:bodyPr>
           <a:lstStyle/>
           <a:p>
-            <a:pPr algn="ctr" indent="0" marL="0">
+            <a:pPr marL="0" indent="0" algn="ctr">
               <a:buNone/>
             </a:pPr>
             <a:r>
@@ -6675,7 +6445,7 @@
           </a:bodyPr>
           <a:lstStyle/>
           <a:p>
-            <a:pPr algn="ctr" indent="0" marL="0">
+            <a:pPr marL="0" indent="0" algn="ctr">
               <a:buNone/>
             </a:pPr>
             <a:r>
@@ -6743,7 +6513,7 @@
           </a:bodyPr>
           <a:lstStyle/>
           <a:p>
-            <a:pPr algn="ctr" indent="0" marL="0">
+            <a:pPr marL="0" indent="0" algn="ctr">
               <a:buNone/>
             </a:pPr>
             <a:r>
@@ -6811,7 +6581,7 @@
           </a:bodyPr>
           <a:lstStyle/>
           <a:p>
-            <a:pPr algn="ctr" indent="0" marL="0">
+            <a:pPr marL="0" indent="0" algn="ctr">
               <a:buNone/>
             </a:pPr>
             <a:r>
@@ -6879,7 +6649,7 @@
           </a:bodyPr>
           <a:lstStyle/>
           <a:p>
-            <a:pPr algn="ctr" indent="0" marL="0">
+            <a:pPr marL="0" indent="0" algn="ctr">
               <a:buNone/>
             </a:pPr>
             <a:r>
@@ -6947,7 +6717,7 @@
           </a:bodyPr>
           <a:lstStyle/>
           <a:p>
-            <a:pPr algn="ctr" indent="0" marL="0">
+            <a:pPr marL="0" indent="0" algn="ctr">
               <a:buNone/>
             </a:pPr>
             <a:r>
@@ -7015,7 +6785,7 @@
           </a:bodyPr>
           <a:lstStyle/>
           <a:p>
-            <a:pPr algn="ctr" indent="0" marL="0">
+            <a:pPr marL="0" indent="0" algn="ctr">
               <a:buNone/>
             </a:pPr>
             <a:r>
@@ -7083,7 +6853,7 @@
           </a:bodyPr>
           <a:lstStyle/>
           <a:p>
-            <a:pPr algn="ctr" indent="0" marL="0">
+            <a:pPr marL="0" indent="0" algn="ctr">
               <a:buNone/>
             </a:pPr>
             <a:r>
@@ -7151,7 +6921,7 @@
           </a:bodyPr>
           <a:lstStyle/>
           <a:p>
-            <a:pPr algn="ctr" indent="0" marL="0">
+            <a:pPr marL="0" indent="0" algn="ctr">
               <a:buNone/>
             </a:pPr>
             <a:r>
@@ -7219,7 +6989,7 @@
           </a:bodyPr>
           <a:lstStyle/>
           <a:p>
-            <a:pPr algn="ctr" indent="0" marL="0">
+            <a:pPr marL="0" indent="0" algn="ctr">
               <a:buNone/>
             </a:pPr>
             <a:r>
@@ -7287,7 +7057,7 @@
           </a:bodyPr>
           <a:lstStyle/>
           <a:p>
-            <a:pPr algn="ctr" indent="0" marL="0">
+            <a:pPr marL="0" indent="0" algn="ctr">
               <a:buNone/>
             </a:pPr>
             <a:r>
@@ -7355,7 +7125,7 @@
           </a:bodyPr>
           <a:lstStyle/>
           <a:p>
-            <a:pPr algn="ctr" indent="0" marL="0">
+            <a:pPr marL="0" indent="0" algn="ctr">
               <a:buNone/>
             </a:pPr>
             <a:r>
@@ -7423,7 +7193,7 @@
           </a:bodyPr>
           <a:lstStyle/>
           <a:p>
-            <a:pPr algn="ctr" indent="0" marL="0">
+            <a:pPr marL="0" indent="0" algn="ctr">
               <a:buNone/>
             </a:pPr>
             <a:r>
@@ -7491,7 +7261,7 @@
           </a:bodyPr>
           <a:lstStyle/>
           <a:p>
-            <a:pPr algn="ctr" indent="0" marL="0">
+            <a:pPr marL="0" indent="0" algn="ctr">
               <a:buNone/>
             </a:pPr>
             <a:r>
@@ -7559,7 +7329,7 @@
           </a:bodyPr>
           <a:lstStyle/>
           <a:p>
-            <a:pPr algn="ctr" indent="0" marL="0">
+            <a:pPr marL="0" indent="0" algn="ctr">
               <a:buNone/>
             </a:pPr>
             <a:r>
@@ -7627,7 +7397,7 @@
           </a:bodyPr>
           <a:lstStyle/>
           <a:p>
-            <a:pPr algn="ctr" indent="0" marL="0">
+            <a:pPr marL="0" indent="0" algn="ctr">
               <a:buNone/>
             </a:pPr>
             <a:r>
@@ -7668,7 +7438,7 @@
           </a:bodyPr>
           <a:lstStyle/>
           <a:p>
-            <a:pPr algn="ctr" indent="0" marL="0">
+            <a:pPr marL="0" indent="0" algn="ctr">
               <a:buNone/>
             </a:pPr>
             <a:r>
@@ -7702,6 +7472,7 @@
         <a:solidFill>
           <a:srgbClr val="FAFBFD"/>
         </a:solidFill>
+        <a:effectLst/>
       </p:bgPr>
     </p:bg>
     <p:spTree>
@@ -7741,7 +7512,7 @@
           </a:bodyPr>
           <a:lstStyle/>
           <a:p>
-            <a:pPr algn="l" indent="0" marL="0">
+            <a:pPr marL="0" indent="0" algn="l">
               <a:buNone/>
             </a:pPr>
             <a:r>
@@ -7782,7 +7553,7 @@
           </a:bodyPr>
           <a:lstStyle/>
           <a:p>
-            <a:pPr algn="l" indent="0" marL="0">
+            <a:pPr marL="0" indent="0" algn="l">
               <a:buNone/>
             </a:pPr>
             <a:r>
@@ -7873,7 +7644,7 @@
           </a:bodyPr>
           <a:lstStyle/>
           <a:p>
-            <a:pPr algn="ctr" indent="0" marL="0">
+            <a:pPr marL="0" indent="0" algn="ctr">
               <a:buNone/>
             </a:pPr>
             <a:r>
@@ -7941,7 +7712,7 @@
           </a:bodyPr>
           <a:lstStyle/>
           <a:p>
-            <a:pPr algn="ctr" indent="0" marL="0">
+            <a:pPr marL="0" indent="0" algn="ctr">
               <a:buNone/>
             </a:pPr>
             <a:r>
@@ -8009,7 +7780,7 @@
           </a:bodyPr>
           <a:lstStyle/>
           <a:p>
-            <a:pPr algn="ctr" indent="0" marL="0">
+            <a:pPr marL="0" indent="0" algn="ctr">
               <a:buNone/>
             </a:pPr>
             <a:r>
@@ -8077,7 +7848,7 @@
           </a:bodyPr>
           <a:lstStyle/>
           <a:p>
-            <a:pPr algn="ctr" indent="0" marL="0">
+            <a:pPr marL="0" indent="0" algn="ctr">
               <a:buNone/>
             </a:pPr>
             <a:r>
@@ -8145,7 +7916,7 @@
           </a:bodyPr>
           <a:lstStyle/>
           <a:p>
-            <a:pPr algn="ctr" indent="0" marL="0">
+            <a:pPr marL="0" indent="0" algn="ctr">
               <a:buNone/>
             </a:pPr>
             <a:r>
@@ -8213,7 +7984,7 @@
           </a:bodyPr>
           <a:lstStyle/>
           <a:p>
-            <a:pPr algn="ctr" indent="0" marL="0">
+            <a:pPr marL="0" indent="0" algn="ctr">
               <a:buNone/>
             </a:pPr>
             <a:r>
@@ -8281,7 +8052,7 @@
           </a:bodyPr>
           <a:lstStyle/>
           <a:p>
-            <a:pPr algn="ctr" indent="0" marL="0">
+            <a:pPr marL="0" indent="0" algn="ctr">
               <a:buNone/>
             </a:pPr>
             <a:r>
@@ -8349,7 +8120,7 @@
           </a:bodyPr>
           <a:lstStyle/>
           <a:p>
-            <a:pPr algn="ctr" indent="0" marL="0">
+            <a:pPr marL="0" indent="0" algn="ctr">
               <a:buNone/>
             </a:pPr>
             <a:r>
@@ -8417,7 +8188,7 @@
           </a:bodyPr>
           <a:lstStyle/>
           <a:p>
-            <a:pPr algn="ctr" indent="0" marL="0">
+            <a:pPr marL="0" indent="0" algn="ctr">
               <a:buNone/>
             </a:pPr>
             <a:r>
@@ -8485,7 +8256,7 @@
           </a:bodyPr>
           <a:lstStyle/>
           <a:p>
-            <a:pPr algn="ctr" indent="0" marL="0">
+            <a:pPr marL="0" indent="0" algn="ctr">
               <a:buNone/>
             </a:pPr>
             <a:r>
@@ -8553,7 +8324,7 @@
           </a:bodyPr>
           <a:lstStyle/>
           <a:p>
-            <a:pPr algn="ctr" indent="0" marL="0">
+            <a:pPr marL="0" indent="0" algn="ctr">
               <a:buNone/>
             </a:pPr>
             <a:r>
@@ -8621,7 +8392,7 @@
           </a:bodyPr>
           <a:lstStyle/>
           <a:p>
-            <a:pPr algn="ctr" indent="0" marL="0">
+            <a:pPr marL="0" indent="0" algn="ctr">
               <a:buNone/>
             </a:pPr>
             <a:r>
@@ -8689,7 +8460,7 @@
           </a:bodyPr>
           <a:lstStyle/>
           <a:p>
-            <a:pPr algn="ctr" indent="0" marL="0">
+            <a:pPr marL="0" indent="0" algn="ctr">
               <a:buNone/>
             </a:pPr>
             <a:r>
@@ -8757,7 +8528,7 @@
           </a:bodyPr>
           <a:lstStyle/>
           <a:p>
-            <a:pPr algn="ctr" indent="0" marL="0">
+            <a:pPr marL="0" indent="0" algn="ctr">
               <a:buNone/>
             </a:pPr>
             <a:r>
@@ -8825,7 +8596,7 @@
           </a:bodyPr>
           <a:lstStyle/>
           <a:p>
-            <a:pPr algn="ctr" indent="0" marL="0">
+            <a:pPr marL="0" indent="0" algn="ctr">
               <a:buNone/>
             </a:pPr>
             <a:r>
@@ -8893,7 +8664,7 @@
           </a:bodyPr>
           <a:lstStyle/>
           <a:p>
-            <a:pPr algn="ctr" indent="0" marL="0">
+            <a:pPr marL="0" indent="0" algn="ctr">
               <a:buNone/>
             </a:pPr>
             <a:r>
@@ -8910,7 +8681,7 @@
             <a:endParaRPr lang="en-US" sz="1300" dirty="0"/>
           </a:p>
           <a:p>
-            <a:pPr algn="ctr" indent="0" marL="0">
+            <a:pPr marL="0" indent="0" algn="ctr">
               <a:buNone/>
             </a:pPr>
             <a:r>
@@ -8927,7 +8698,7 @@
             <a:endParaRPr lang="en-US" sz="1300" dirty="0"/>
           </a:p>
           <a:p>
-            <a:pPr algn="ctr" indent="0" marL="0">
+            <a:pPr marL="0" indent="0" algn="ctr">
               <a:buNone/>
             </a:pPr>
             <a:r>
@@ -8944,7 +8715,7 @@
             <a:endParaRPr lang="en-US" sz="1300" dirty="0"/>
           </a:p>
           <a:p>
-            <a:pPr algn="ctr" indent="0" marL="0">
+            <a:pPr marL="0" indent="0" algn="ctr">
               <a:buNone/>
             </a:pPr>
             <a:r>
@@ -8961,7 +8732,7 @@
             <a:endParaRPr lang="en-US" sz="1300" dirty="0"/>
           </a:p>
           <a:p>
-            <a:pPr algn="ctr" indent="0" marL="0">
+            <a:pPr marL="0" indent="0" algn="ctr">
               <a:buNone/>
             </a:pPr>
             <a:r>
@@ -9002,7 +8773,7 @@
           </a:bodyPr>
           <a:lstStyle/>
           <a:p>
-            <a:pPr algn="ctr" indent="0" marL="0">
+            <a:pPr marL="0" indent="0" algn="ctr">
               <a:buNone/>
             </a:pPr>
             <a:r>
@@ -9321,4 +9092,299 @@
     </a:ext>
   </a:extLst>
 </a:theme>
+</file>
+
+<file path=ppt/theme/theme2.xml><?xml version="1.0" encoding="utf-8"?>
+<a:theme xmlns:a="http://schemas.openxmlformats.org/drawingml/2006/main" name="Office 테마">
+  <a:themeElements>
+    <a:clrScheme name="Office">
+      <a:dk1>
+        <a:sysClr val="windowText" lastClr="000000"/>
+      </a:dk1>
+      <a:lt1>
+        <a:sysClr val="window" lastClr="FFFFFF"/>
+      </a:lt1>
+      <a:dk2>
+        <a:srgbClr val="44546A"/>
+      </a:dk2>
+      <a:lt2>
+        <a:srgbClr val="E7E6E6"/>
+      </a:lt2>
+      <a:accent1>
+        <a:srgbClr val="4472C4"/>
+      </a:accent1>
+      <a:accent2>
+        <a:srgbClr val="ED7D31"/>
+      </a:accent2>
+      <a:accent3>
+        <a:srgbClr val="A5A5A5"/>
+      </a:accent3>
+      <a:accent4>
+        <a:srgbClr val="FFC000"/>
+      </a:accent4>
+      <a:accent5>
+        <a:srgbClr val="5B9BD5"/>
+      </a:accent5>
+      <a:accent6>
+        <a:srgbClr val="70AD47"/>
+      </a:accent6>
+      <a:hlink>
+        <a:srgbClr val="0563C1"/>
+      </a:hlink>
+      <a:folHlink>
+        <a:srgbClr val="954F72"/>
+      </a:folHlink>
+    </a:clrScheme>
+    <a:fontScheme name="Office">
+      <a:majorFont>
+        <a:latin typeface="맑은 고딕" panose="020F0302020204030204"/>
+        <a:ea typeface=""/>
+        <a:cs typeface=""/>
+        <a:font script="Jpan" typeface="游ゴシック Light"/>
+        <a:font script="Hang" typeface="맑은 고딕"/>
+        <a:font script="Hans" typeface="等线 Light"/>
+        <a:font script="Hant" typeface="新細明體"/>
+        <a:font script="Arab" typeface="Times New Roman"/>
+        <a:font script="Hebr" typeface="Times New Roman"/>
+        <a:font script="Thai" typeface="Angsana New"/>
+        <a:font script="Ethi" typeface="Nyala"/>
+        <a:font script="Beng" typeface="Vrinda"/>
+        <a:font script="Gujr" typeface="Shruti"/>
+        <a:font script="Khmr" typeface="MoolBoran"/>
+        <a:font script="Knda" typeface="Tunga"/>
+        <a:font script="Guru" typeface="Raavi"/>
+        <a:font script="Cans" typeface="Euphemia"/>
+        <a:font script="Cher" typeface="Plantagenet Cherokee"/>
+        <a:font script="Yiii" typeface="Microsoft Yi Baiti"/>
+        <a:font script="Tibt" typeface="Microsoft Himalaya"/>
+        <a:font script="Thaa" typeface="MV Boli"/>
+        <a:font script="Deva" typeface="Mangal"/>
+        <a:font script="Telu" typeface="Gautami"/>
+        <a:font script="Taml" typeface="Latha"/>
+        <a:font script="Syrc" typeface="Estrangelo Edessa"/>
+        <a:font script="Orya" typeface="Kalinga"/>
+        <a:font script="Mlym" typeface="Kartika"/>
+        <a:font script="Laoo" typeface="DokChampa"/>
+        <a:font script="Sinh" typeface="Iskoola Pota"/>
+        <a:font script="Mong" typeface="Mongolian Baiti"/>
+        <a:font script="Viet" typeface="Times New Roman"/>
+        <a:font script="Uigh" typeface="Microsoft Uighur"/>
+        <a:font script="Geor" typeface="Sylfaen"/>
+        <a:font script="Armn" typeface="Arial"/>
+        <a:font script="Bugi" typeface="Leelawadee UI"/>
+        <a:font script="Bopo" typeface="Microsoft JhengHei"/>
+        <a:font script="Java" typeface="Javanese Text"/>
+        <a:font script="Lisu" typeface="Segoe UI"/>
+        <a:font script="Mymr" typeface="Myanmar Text"/>
+        <a:font script="Nkoo" typeface="Ebrima"/>
+        <a:font script="Olck" typeface="Nirmala UI"/>
+        <a:font script="Osma" typeface="Ebrima"/>
+        <a:font script="Phag" typeface="Phagspa"/>
+        <a:font script="Syrn" typeface="Estrangelo Edessa"/>
+        <a:font script="Syrj" typeface="Estrangelo Edessa"/>
+        <a:font script="Syre" typeface="Estrangelo Edessa"/>
+        <a:font script="Sora" typeface="Nirmala UI"/>
+        <a:font script="Tale" typeface="Microsoft Tai Le"/>
+        <a:font script="Talu" typeface="Microsoft New Tai Lue"/>
+        <a:font script="Tfng" typeface="Ebrima"/>
+      </a:majorFont>
+      <a:minorFont>
+        <a:latin typeface="맑은 고딕" panose="020F0502020204030204"/>
+        <a:ea typeface=""/>
+        <a:cs typeface=""/>
+        <a:font script="Jpan" typeface="游ゴシック"/>
+        <a:font script="Hang" typeface="맑은 고딕"/>
+        <a:font script="Hans" typeface="等线"/>
+        <a:font script="Hant" typeface="新細明體"/>
+        <a:font script="Arab" typeface="Arial"/>
+        <a:font script="Hebr" typeface="Arial"/>
+        <a:font script="Thai" typeface="Cordia New"/>
+        <a:font script="Ethi" typeface="Nyala"/>
+        <a:font script="Beng" typeface="Vrinda"/>
+        <a:font script="Gujr" typeface="Shruti"/>
+        <a:font script="Khmr" typeface="DaunPenh"/>
+        <a:font script="Knda" typeface="Tunga"/>
+        <a:font script="Guru" typeface="Raavi"/>
+        <a:font script="Cans" typeface="Euphemia"/>
+        <a:font script="Cher" typeface="Plantagenet Cherokee"/>
+        <a:font script="Yiii" typeface="Microsoft Yi Baiti"/>
+        <a:font script="Tibt" typeface="Microsoft Himalaya"/>
+        <a:font script="Thaa" typeface="MV Boli"/>
+        <a:font script="Deva" typeface="Mangal"/>
+        <a:font script="Telu" typeface="Gautami"/>
+        <a:font script="Taml" typeface="Latha"/>
+        <a:font script="Syrc" typeface="Estrangelo Edessa"/>
+        <a:font script="Orya" typeface="Kalinga"/>
+        <a:font script="Mlym" typeface="Kartika"/>
+        <a:font script="Laoo" typeface="DokChampa"/>
+        <a:font script="Sinh" typeface="Iskoola Pota"/>
+        <a:font script="Mong" typeface="Mongolian Baiti"/>
+        <a:font script="Viet" typeface="Arial"/>
+        <a:font script="Uigh" typeface="Microsoft Uighur"/>
+        <a:font script="Geor" typeface="Sylfaen"/>
+        <a:font script="Armn" typeface="Arial"/>
+        <a:font script="Bugi" typeface="Leelawadee UI"/>
+        <a:font script="Bopo" typeface="Microsoft JhengHei"/>
+        <a:font script="Java" typeface="Javanese Text"/>
+        <a:font script="Lisu" typeface="Segoe UI"/>
+        <a:font script="Mymr" typeface="Myanmar Text"/>
+        <a:font script="Nkoo" typeface="Ebrima"/>
+        <a:font script="Olck" typeface="Nirmala UI"/>
+        <a:font script="Osma" typeface="Ebrima"/>
+        <a:font script="Phag" typeface="Phagspa"/>
+        <a:font script="Syrn" typeface="Estrangelo Edessa"/>
+        <a:font script="Syrj" typeface="Estrangelo Edessa"/>
+        <a:font script="Syre" typeface="Estrangelo Edessa"/>
+        <a:font script="Sora" typeface="Nirmala UI"/>
+        <a:font script="Tale" typeface="Microsoft Tai Le"/>
+        <a:font script="Talu" typeface="Microsoft New Tai Lue"/>
+        <a:font script="Tfng" typeface="Ebrima"/>
+      </a:minorFont>
+    </a:fontScheme>
+    <a:fmtScheme name="Office">
+      <a:fillStyleLst>
+        <a:solidFill>
+          <a:schemeClr val="phClr"/>
+        </a:solidFill>
+        <a:gradFill rotWithShape="1">
+          <a:gsLst>
+            <a:gs pos="0">
+              <a:schemeClr val="phClr">
+                <a:lumMod val="110000"/>
+                <a:satMod val="105000"/>
+                <a:tint val="67000"/>
+              </a:schemeClr>
+            </a:gs>
+            <a:gs pos="50000">
+              <a:schemeClr val="phClr">
+                <a:lumMod val="105000"/>
+                <a:satMod val="103000"/>
+                <a:tint val="73000"/>
+              </a:schemeClr>
+            </a:gs>
+            <a:gs pos="100000">
+              <a:schemeClr val="phClr">
+                <a:lumMod val="105000"/>
+                <a:satMod val="109000"/>
+                <a:tint val="81000"/>
+              </a:schemeClr>
+            </a:gs>
+          </a:gsLst>
+          <a:lin ang="5400000" scaled="0"/>
+        </a:gradFill>
+        <a:gradFill rotWithShape="1">
+          <a:gsLst>
+            <a:gs pos="0">
+              <a:schemeClr val="phClr">
+                <a:satMod val="103000"/>
+                <a:lumMod val="102000"/>
+                <a:tint val="94000"/>
+              </a:schemeClr>
+            </a:gs>
+            <a:gs pos="50000">
+              <a:schemeClr val="phClr">
+                <a:satMod val="110000"/>
+                <a:lumMod val="100000"/>
+                <a:shade val="100000"/>
+              </a:schemeClr>
+            </a:gs>
+            <a:gs pos="100000">
+              <a:schemeClr val="phClr">
+                <a:lumMod val="99000"/>
+                <a:satMod val="120000"/>
+                <a:shade val="78000"/>
+              </a:schemeClr>
+            </a:gs>
+          </a:gsLst>
+          <a:lin ang="5400000" scaled="0"/>
+        </a:gradFill>
+      </a:fillStyleLst>
+      <a:lnStyleLst>
+        <a:ln w="6350" cap="flat" cmpd="sng" algn="ctr">
+          <a:solidFill>
+            <a:schemeClr val="phClr"/>
+          </a:solidFill>
+          <a:prstDash val="solid"/>
+          <a:miter lim="800000"/>
+        </a:ln>
+        <a:ln w="12700" cap="flat" cmpd="sng" algn="ctr">
+          <a:solidFill>
+            <a:schemeClr val="phClr"/>
+          </a:solidFill>
+          <a:prstDash val="solid"/>
+          <a:miter lim="800000"/>
+        </a:ln>
+        <a:ln w="19050" cap="flat" cmpd="sng" algn="ctr">
+          <a:solidFill>
+            <a:schemeClr val="phClr"/>
+          </a:solidFill>
+          <a:prstDash val="solid"/>
+          <a:miter lim="800000"/>
+        </a:ln>
+      </a:lnStyleLst>
+      <a:effectStyleLst>
+        <a:effectStyle>
+          <a:effectLst/>
+        </a:effectStyle>
+        <a:effectStyle>
+          <a:effectLst/>
+        </a:effectStyle>
+        <a:effectStyle>
+          <a:effectLst>
+            <a:outerShdw blurRad="57150" dist="19050" dir="5400000" algn="ctr" rotWithShape="0">
+              <a:srgbClr val="000000">
+                <a:alpha val="63000"/>
+              </a:srgbClr>
+            </a:outerShdw>
+          </a:effectLst>
+        </a:effectStyle>
+      </a:effectStyleLst>
+      <a:bgFillStyleLst>
+        <a:solidFill>
+          <a:schemeClr val="phClr"/>
+        </a:solidFill>
+        <a:solidFill>
+          <a:schemeClr val="phClr">
+            <a:tint val="95000"/>
+            <a:satMod val="170000"/>
+          </a:schemeClr>
+        </a:solidFill>
+        <a:gradFill rotWithShape="1">
+          <a:gsLst>
+            <a:gs pos="0">
+              <a:schemeClr val="phClr">
+                <a:tint val="93000"/>
+                <a:satMod val="150000"/>
+                <a:shade val="98000"/>
+                <a:lumMod val="102000"/>
+              </a:schemeClr>
+            </a:gs>
+            <a:gs pos="50000">
+              <a:schemeClr val="phClr">
+                <a:tint val="98000"/>
+                <a:satMod val="130000"/>
+                <a:shade val="90000"/>
+                <a:lumMod val="103000"/>
+              </a:schemeClr>
+            </a:gs>
+            <a:gs pos="100000">
+              <a:schemeClr val="phClr">
+                <a:shade val="63000"/>
+                <a:satMod val="120000"/>
+              </a:schemeClr>
+            </a:gs>
+          </a:gsLst>
+          <a:lin ang="5400000" scaled="0"/>
+        </a:gradFill>
+      </a:bgFillStyleLst>
+    </a:fmtScheme>
+  </a:themeElements>
+  <a:objectDefaults/>
+  <a:extraClrSchemeLst/>
+  <a:extLst>
+    <a:ext uri="{05A4C25C-085E-4340-85A3-A5531E510DB2}">
+      <thm15:themeFamily xmlns:thm15="http://schemas.microsoft.com/office/thememl/2012/main" name="Office Theme" id="{62F939B6-93AF-4DB8-9C6B-D6C7DFDC589F}" vid="{4A3C46E8-61CC-4603-A589-7422A47A8E4A}"/>
+    </a:ext>
+  </a:extLst>
+</a:theme>
 </file>